--- a/reports/gujarat-sir-2026-deck.pptx
+++ b/reports/gujarat-sir-2026-deck.pptx
@@ -2126,7 +2126,7 @@
       </p:sp>
       <p:pic>
         <p:nvPicPr>
-          <p:cNvPr id="4" name="Image 0" descr="/tmp/pack-8Tsy5x/gj-gujaratelections-3.png">    </p:cNvPr>
+          <p:cNvPr id="4" name="Image 0" descr="/tmp/pack-7qNEwO/gj-gujaratelections-3.png">    </p:cNvPr>
           <p:cNvPicPr>
             <a:picLocks noChangeAspect="1"/>
           </p:cNvPicPr>
@@ -2452,7 +2452,7 @@
       </p:sp>
       <p:pic>
         <p:nvPicPr>
-          <p:cNvPr id="4" name="Image 0" descr="/tmp/pack-8Tsy5x/gj-gujarat-1.png">    </p:cNvPr>
+          <p:cNvPr id="4" name="Image 0" descr="/tmp/pack-7qNEwO/gj-gujarat-1.png">    </p:cNvPr>
           <p:cNvPicPr>
             <a:picLocks noChangeAspect="1"/>
           </p:cNvPicPr>
@@ -2625,7 +2625,7 @@
       </p:sp>
       <p:pic>
         <p:nvPicPr>
-          <p:cNvPr id="4" name="Image 0" descr="/tmp/pack-8Tsy5x/gj-gujarat-2.png">    </p:cNvPr>
+          <p:cNvPr id="4" name="Image 0" descr="/tmp/pack-7qNEwO/gj-gujarat-2.png">    </p:cNvPr>
           <p:cNvPicPr>
             <a:picLocks noChangeAspect="1"/>
           </p:cNvPicPr>
@@ -2837,7 +2837,7 @@
       </p:sp>
       <p:pic>
         <p:nvPicPr>
-          <p:cNvPr id="4" name="Image 0" descr="/tmp/pack-8Tsy5x/gj-gujarat-3.png">    </p:cNvPr>
+          <p:cNvPr id="4" name="Image 0" descr="/tmp/pack-7qNEwO/gj-gujarat-3.png">    </p:cNvPr>
           <p:cNvPicPr>
             <a:picLocks noChangeAspect="1"/>
           </p:cNvPicPr>
@@ -3010,7 +3010,7 @@
       </p:sp>
       <p:pic>
         <p:nvPicPr>
-          <p:cNvPr id="4" name="Image 0" descr="/tmp/pack-8Tsy5x/gj-gujarat-4.png">    </p:cNvPr>
+          <p:cNvPr id="4" name="Image 0" descr="/tmp/pack-7qNEwO/gj-gujarat-4.png">    </p:cNvPr>
           <p:cNvPicPr>
             <a:picLocks noChangeAspect="1"/>
           </p:cNvPicPr>
@@ -3222,7 +3222,7 @@
       </p:sp>
       <p:pic>
         <p:nvPicPr>
-          <p:cNvPr id="4" name="Image 0" descr="/tmp/pack-8Tsy5x/gj-gujarat-6.png">    </p:cNvPr>
+          <p:cNvPr id="4" name="Image 0" descr="/tmp/pack-7qNEwO/gj-gujarat-6.png">    </p:cNvPr>
           <p:cNvPicPr>
             <a:picLocks noChangeAspect="1"/>
           </p:cNvPicPr>
@@ -3434,7 +3434,7 @@
       </p:sp>
       <p:pic>
         <p:nvPicPr>
-          <p:cNvPr id="4" name="Image 0" descr="/tmp/pack-8Tsy5x/gj-gujarat-7.png">    </p:cNvPr>
+          <p:cNvPr id="4" name="Image 0" descr="/tmp/pack-7qNEwO/gj-gujarat-7.png">    </p:cNvPr>
           <p:cNvPicPr>
             <a:picLocks noChangeAspect="1"/>
           </p:cNvPicPr>
@@ -3607,7 +3607,7 @@
       </p:sp>
       <p:pic>
         <p:nvPicPr>
-          <p:cNvPr id="4" name="Image 0" descr="/tmp/pack-8Tsy5x/gj-gujaratelections-0.png">    </p:cNvPr>
+          <p:cNvPr id="4" name="Image 0" descr="/tmp/pack-7qNEwO/gj-gujaratelections-0.png">    </p:cNvPr>
           <p:cNvPicPr>
             <a:picLocks noChangeAspect="1"/>
           </p:cNvPicPr>
@@ -3780,7 +3780,7 @@
       </p:sp>
       <p:pic>
         <p:nvPicPr>
-          <p:cNvPr id="4" name="Image 0" descr="/tmp/pack-8Tsy5x/gj-gujaratelections-2.png">    </p:cNvPr>
+          <p:cNvPr id="4" name="Image 0" descr="/tmp/pack-7qNEwO/gj-gujaratelections-2.png">    </p:cNvPr>
           <p:cNvPicPr>
             <a:picLocks noChangeAspect="1"/>
           </p:cNvPicPr>

--- a/reports/gujarat-sir-2026-deck.pptx
+++ b/reports/gujarat-sir-2026-deck.pptx
@@ -2126,7 +2126,7 @@
       </p:sp>
       <p:pic>
         <p:nvPicPr>
-          <p:cNvPr id="4" name="Image 0" descr="/tmp/pack-7qNEwO/gj-gujaratelections-3.png">    </p:cNvPr>
+          <p:cNvPr id="4" name="Image 0" descr="/tmp/pack-BpyxFC/gj-gujaratelections-3.png">    </p:cNvPr>
           <p:cNvPicPr>
             <a:picLocks noChangeAspect="1"/>
           </p:cNvPicPr>
@@ -2452,7 +2452,7 @@
       </p:sp>
       <p:pic>
         <p:nvPicPr>
-          <p:cNvPr id="4" name="Image 0" descr="/tmp/pack-7qNEwO/gj-gujarat-1.png">    </p:cNvPr>
+          <p:cNvPr id="4" name="Image 0" descr="/tmp/pack-BpyxFC/gj-gujarat-1.png">    </p:cNvPr>
           <p:cNvPicPr>
             <a:picLocks noChangeAspect="1"/>
           </p:cNvPicPr>
@@ -2625,7 +2625,7 @@
       </p:sp>
       <p:pic>
         <p:nvPicPr>
-          <p:cNvPr id="4" name="Image 0" descr="/tmp/pack-7qNEwO/gj-gujarat-2.png">    </p:cNvPr>
+          <p:cNvPr id="4" name="Image 0" descr="/tmp/pack-BpyxFC/gj-gujarat-2.png">    </p:cNvPr>
           <p:cNvPicPr>
             <a:picLocks noChangeAspect="1"/>
           </p:cNvPicPr>
@@ -2837,7 +2837,7 @@
       </p:sp>
       <p:pic>
         <p:nvPicPr>
-          <p:cNvPr id="4" name="Image 0" descr="/tmp/pack-7qNEwO/gj-gujarat-3.png">    </p:cNvPr>
+          <p:cNvPr id="4" name="Image 0" descr="/tmp/pack-BpyxFC/gj-gujarat-3.png">    </p:cNvPr>
           <p:cNvPicPr>
             <a:picLocks noChangeAspect="1"/>
           </p:cNvPicPr>
@@ -3010,7 +3010,7 @@
       </p:sp>
       <p:pic>
         <p:nvPicPr>
-          <p:cNvPr id="4" name="Image 0" descr="/tmp/pack-7qNEwO/gj-gujarat-4.png">    </p:cNvPr>
+          <p:cNvPr id="4" name="Image 0" descr="/tmp/pack-BpyxFC/gj-gujarat-4.png">    </p:cNvPr>
           <p:cNvPicPr>
             <a:picLocks noChangeAspect="1"/>
           </p:cNvPicPr>
@@ -3222,7 +3222,7 @@
       </p:sp>
       <p:pic>
         <p:nvPicPr>
-          <p:cNvPr id="4" name="Image 0" descr="/tmp/pack-7qNEwO/gj-gujarat-6.png">    </p:cNvPr>
+          <p:cNvPr id="4" name="Image 0" descr="/tmp/pack-BpyxFC/gj-gujarat-6.png">    </p:cNvPr>
           <p:cNvPicPr>
             <a:picLocks noChangeAspect="1"/>
           </p:cNvPicPr>
@@ -3434,7 +3434,7 @@
       </p:sp>
       <p:pic>
         <p:nvPicPr>
-          <p:cNvPr id="4" name="Image 0" descr="/tmp/pack-7qNEwO/gj-gujarat-7.png">    </p:cNvPr>
+          <p:cNvPr id="4" name="Image 0" descr="/tmp/pack-BpyxFC/gj-gujarat-7.png">    </p:cNvPr>
           <p:cNvPicPr>
             <a:picLocks noChangeAspect="1"/>
           </p:cNvPicPr>
@@ -3607,7 +3607,7 @@
       </p:sp>
       <p:pic>
         <p:nvPicPr>
-          <p:cNvPr id="4" name="Image 0" descr="/tmp/pack-7qNEwO/gj-gujaratelections-0.png">    </p:cNvPr>
+          <p:cNvPr id="4" name="Image 0" descr="/tmp/pack-BpyxFC/gj-gujaratelections-0.png">    </p:cNvPr>
           <p:cNvPicPr>
             <a:picLocks noChangeAspect="1"/>
           </p:cNvPicPr>
@@ -3780,7 +3780,7 @@
       </p:sp>
       <p:pic>
         <p:nvPicPr>
-          <p:cNvPr id="4" name="Image 0" descr="/tmp/pack-7qNEwO/gj-gujaratelections-2.png">    </p:cNvPr>
+          <p:cNvPr id="4" name="Image 0" descr="/tmp/pack-BpyxFC/gj-gujaratelections-2.png">    </p:cNvPr>
           <p:cNvPicPr>
             <a:picLocks noChangeAspect="1"/>
           </p:cNvPicPr>
